--- a/public/fun/pack/pptx/news/카드뉴스_46_알뜰생활팁_새벽시장.pptx
+++ b/public/fun/pack/pptx/news/카드뉴스_46_알뜰생활팁_새벽시장.pptx
@@ -3287,6 +3287,14 @@
 <file path=ppt/slides/slide1.xml><?xml version="1.0" encoding="utf-8"?>
 <p:sld xmlns:a="http://schemas.openxmlformats.org/drawingml/2006/main" xmlns:p="http://schemas.openxmlformats.org/presentationml/2006/main" xmlns:r="http://schemas.openxmlformats.org/officeDocument/2006/relationships">
   <p:cSld>
+    <p:bg>
+      <p:bgPr>
+        <a:solidFill>
+          <a:srgbClr val="D5EEF6"/>
+        </a:solidFill>
+        <a:effectLst/>
+      </p:bgPr>
+    </p:bg>
     <p:spTree>
       <p:nvGrpSpPr>
         <p:cNvPr id="1" name=""/>
@@ -3294,30 +3302,102 @@
         <p:nvPr/>
       </p:nvGrpSpPr>
       <p:grpSpPr/>
-      <p:pic>
-        <p:nvPicPr>
-          <p:cNvPr id="3" name="표지 그림" descr="news-46.jpg"/>
-          <p:cNvPicPr>
-            <a:picLocks noChangeAspect="1"/>
-          </p:cNvPicPr>
+      <p:sp>
+        <p:nvSpPr>
+          <p:cNvPr id="3" name="장식"/>
+          <p:cNvSpPr/>
           <p:nvPr/>
-        </p:nvPicPr>
-        <p:blipFill>
-          <a:blip r:embed="rId2"/>
-          <a:stretch>
-            <a:fillRect/>
-          </a:stretch>
-        </p:blipFill>
-        <p:spPr>
-          <a:xfrm>
-            <a:off x="0" y="0"/>
-            <a:ext cx="6858000" cy="6858000"/>
+        </p:nvSpPr>
+        <p:spPr>
+          <a:xfrm>
+            <a:off x="1600200" y="822960"/>
+            <a:ext cx="3657600" cy="3657600"/>
+          </a:xfrm>
+          <a:prstGeom prst="ellipse">
+            <a:avLst/>
+          </a:prstGeom>
+          <a:solidFill>
+            <a:srgbClr val="FFFFFF"/>
+          </a:solidFill>
+          <a:ln>
+            <a:noFill/>
+          </a:ln>
+        </p:spPr>
+        <p:txBody>
+          <a:bodyPr rtlCol="0" anchor="ctr"/>
+          <a:lstStyle/>
+          <a:p>
+            <a:pPr algn="ctr"/>
+          </a:p>
+        </p:txBody>
+      </p:sp>
+      <p:sp>
+        <p:nvSpPr>
+          <p:cNvPr id="4" name="장식"/>
+          <p:cNvSpPr/>
+          <p:nvPr/>
+        </p:nvSpPr>
+        <p:spPr>
+          <a:xfrm>
+            <a:off x="3246120" y="502920"/>
+            <a:ext cx="822960" cy="822960"/>
+          </a:xfrm>
+          <a:prstGeom prst="ellipse">
+            <a:avLst/>
+          </a:prstGeom>
+          <a:solidFill>
+            <a:srgbClr val="ADDBEB"/>
+          </a:solidFill>
+          <a:ln>
+            <a:noFill/>
+          </a:ln>
+        </p:spPr>
+        <p:txBody>
+          <a:bodyPr rtlCol="0" anchor="ctr"/>
+          <a:lstStyle/>
+          <a:p>
+            <a:pPr algn="ctr"/>
+          </a:p>
+        </p:txBody>
+      </p:sp>
+      <p:sp>
+        <p:nvSpPr>
+          <p:cNvPr id="5" name="라벨"/>
+          <p:cNvSpPr txBox="1"/>
+          <p:nvPr/>
+        </p:nvSpPr>
+        <p:spPr>
+          <a:xfrm>
+            <a:off x="731520" y="4572000"/>
+            <a:ext cx="5394960" cy="274320"/>
           </a:xfrm>
           <a:prstGeom prst="rect">
             <a:avLst/>
           </a:prstGeom>
-        </p:spPr>
-      </p:pic>
+          <a:noFill/>
+        </p:spPr>
+        <p:txBody>
+          <a:bodyPr wrap="square" lIns="54864" rIns="54864" tIns="27432" bIns="27432" anchor="t">
+            <a:noAutofit/>
+          </a:bodyPr>
+          <a:lstStyle/>
+          <a:p>
+            <a:pPr algn="ctr">
+              <a:lnSpc>
+                <a:spcPct val="115000"/>
+              </a:lnSpc>
+            </a:pPr>
+            <a:r>
+              <a:rPr sz="1000" b="1" i="0" spc="250">
+                <a:solidFill>
+                  <a:srgbClr val="26231F"/>
+                </a:solidFill>
+              </a:rPr>
+              <a:t>CARD NEWS</a:t>
+            </a:r>
+          </a:p>
+        </p:txBody>
+      </p:sp>
       <p:sp>
         <p:nvSpPr>
           <p:cNvPr id="2" name="Title 1"/>
@@ -3330,8 +3410,8 @@
         </p:nvSpPr>
         <p:spPr>
           <a:xfrm>
-            <a:off x="685800" y="960120"/>
-            <a:ext cx="5486400" cy="1463040"/>
+            <a:off x="731520" y="4892040"/>
+            <a:ext cx="5394960" cy="914400"/>
           </a:xfrm>
         </p:spPr>
         <p:txBody>
@@ -3340,7 +3420,7 @@
           </a:bodyPr>
           <a:lstStyle/>
           <a:p>
-            <a:pPr algn="l">
+            <a:pPr algn="ctr">
               <a:lnSpc>
                 <a:spcPct val="105000"/>
               </a:lnSpc>
@@ -3348,24 +3428,24 @@
             <a:r>
               <a:rPr sz="3000" b="1" i="0">
                 <a:solidFill>
-                  <a:srgbClr val="1C5A6E"/>
+                  <a:srgbClr val="26231F"/>
                 </a:solidFill>
               </a:rPr>
-              <a:t>새해 가계부 쓰기 시작하는 법</a:t>
-            </a:r>
-          </a:p>
-        </p:txBody>
-      </p:sp>
-      <p:sp>
-        <p:nvSpPr>
-          <p:cNvPr id="4" name="한 줄 문구"/>
+              <a:t>가계부 쓰기 시작하는 법</a:t>
+            </a:r>
+          </a:p>
+        </p:txBody>
+      </p:sp>
+      <p:sp>
+        <p:nvSpPr>
+          <p:cNvPr id="6" name="한 줄 문구"/>
           <p:cNvSpPr txBox="1"/>
           <p:nvPr/>
         </p:nvSpPr>
         <p:spPr>
           <a:xfrm>
-            <a:off x="685800" y="2560320"/>
-            <a:ext cx="5486400" cy="822960"/>
+            <a:off x="731520" y="5806440"/>
+            <a:ext cx="5394960" cy="822960"/>
           </a:xfrm>
           <a:prstGeom prst="rect">
             <a:avLst/>
@@ -3378,15 +3458,15 @@
           </a:bodyPr>
           <a:lstStyle/>
           <a:p>
-            <a:pPr algn="l">
+            <a:pPr algn="ctr">
               <a:lnSpc>
                 <a:spcPct val="115000"/>
               </a:lnSpc>
             </a:pPr>
             <a:r>
-              <a:rPr sz="1500" b="0" i="1">
+              <a:rPr sz="1500" b="0" i="0">
                 <a:solidFill>
-                  <a:srgbClr val="1C5A6E"/>
+                  <a:srgbClr val="26231F"/>
                 </a:solidFill>
               </a:rPr>
               <a:t>옆으로 넘겨 보세요 →</a:t>
@@ -3396,14 +3476,14 @@
       </p:sp>
       <p:sp>
         <p:nvSpPr>
-          <p:cNvPr id="5" name="안내 문구"/>
+          <p:cNvPr id="7" name="안내 문구"/>
           <p:cNvSpPr txBox="1"/>
           <p:nvPr/>
         </p:nvSpPr>
         <p:spPr>
           <a:xfrm>
-            <a:off x="685800" y="3429000"/>
-            <a:ext cx="5486400" cy="914400"/>
+            <a:off x="731520" y="6675120"/>
+            <a:ext cx="5394960" cy="914400"/>
           </a:xfrm>
           <a:prstGeom prst="rect">
             <a:avLst/>
@@ -3416,7 +3496,7 @@
           </a:bodyPr>
           <a:lstStyle/>
           <a:p>
-            <a:pPr algn="l">
+            <a:pPr algn="ctr">
               <a:lnSpc>
                 <a:spcPct val="115000"/>
               </a:lnSpc>
@@ -3424,7 +3504,7 @@
             <a:r>
               <a:rPr sz="1200" b="0" i="0">
                 <a:solidFill>
-                  <a:srgbClr val="666666"/>
+                  <a:srgbClr val="26231F"/>
                 </a:solidFill>
               </a:rPr>
               <a:t>알뜰 생활 팁 · 카드뉴스</a:t>
@@ -3466,14 +3546,14 @@
         </p:nvSpPr>
         <p:spPr>
           <a:xfrm>
-            <a:off x="0" y="384048"/>
-            <a:ext cx="5349240" cy="896112"/>
-          </a:xfrm>
-          <a:prstGeom prst="homePlate">
+            <a:off x="0" y="6565392"/>
+            <a:ext cx="6858000" cy="292608"/>
+          </a:xfrm>
+          <a:prstGeom prst="rect">
             <a:avLst/>
           </a:prstGeom>
           <a:solidFill>
-            <a:srgbClr val="45BCE3"/>
+            <a:srgbClr val="ADDBEB"/>
           </a:solidFill>
           <a:ln>
             <a:noFill/>
@@ -3489,6 +3569,102 @@
       </p:sp>
       <p:sp>
         <p:nvSpPr>
+          <p:cNvPr id="4" name="장식"/>
+          <p:cNvSpPr/>
+          <p:nvPr/>
+        </p:nvSpPr>
+        <p:spPr>
+          <a:xfrm>
+            <a:off x="4846320" y="-1645920"/>
+            <a:ext cx="3474720" cy="3474720"/>
+          </a:xfrm>
+          <a:prstGeom prst="ellipse">
+            <a:avLst/>
+          </a:prstGeom>
+          <a:solidFill>
+            <a:srgbClr val="ADDBEB"/>
+          </a:solidFill>
+          <a:ln>
+            <a:noFill/>
+          </a:ln>
+        </p:spPr>
+        <p:txBody>
+          <a:bodyPr rtlCol="0" anchor="ctr"/>
+          <a:lstStyle/>
+          <a:p>
+            <a:pPr algn="ctr"/>
+          </a:p>
+        </p:txBody>
+      </p:sp>
+      <p:sp>
+        <p:nvSpPr>
+          <p:cNvPr id="5" name="상단 라벨"/>
+          <p:cNvSpPr txBox="1"/>
+          <p:nvPr/>
+        </p:nvSpPr>
+        <p:spPr>
+          <a:xfrm>
+            <a:off x="640080" y="274320"/>
+            <a:ext cx="5486400" cy="274320"/>
+          </a:xfrm>
+          <a:prstGeom prst="rect">
+            <a:avLst/>
+          </a:prstGeom>
+          <a:noFill/>
+        </p:spPr>
+        <p:txBody>
+          <a:bodyPr wrap="square" lIns="54864" rIns="54864" tIns="27432" bIns="27432" anchor="ctr">
+            <a:noAutofit/>
+          </a:bodyPr>
+          <a:lstStyle/>
+          <a:p>
+            <a:pPr algn="l">
+              <a:lnSpc>
+                <a:spcPct val="115000"/>
+              </a:lnSpc>
+            </a:pPr>
+            <a:r>
+              <a:rPr sz="900" b="1" i="0" spc="250">
+                <a:solidFill>
+                  <a:srgbClr val="26231F"/>
+                </a:solidFill>
+              </a:rPr>
+              <a:t>CARD NEWS</a:t>
+            </a:r>
+          </a:p>
+        </p:txBody>
+      </p:sp>
+      <p:sp>
+        <p:nvSpPr>
+          <p:cNvPr id="6" name="포인트"/>
+          <p:cNvSpPr/>
+          <p:nvPr/>
+        </p:nvSpPr>
+        <p:spPr>
+          <a:xfrm>
+            <a:off x="5715000" y="502919"/>
+            <a:ext cx="274320" cy="274320"/>
+          </a:xfrm>
+          <a:prstGeom prst="donut">
+            <a:avLst/>
+          </a:prstGeom>
+          <a:solidFill>
+            <a:srgbClr val="FFFFFF"/>
+          </a:solidFill>
+          <a:ln>
+            <a:noFill/>
+          </a:ln>
+        </p:spPr>
+        <p:txBody>
+          <a:bodyPr rtlCol="0" anchor="ctr"/>
+          <a:lstStyle/>
+          <a:p>
+            <a:pPr algn="ctr"/>
+          </a:p>
+        </p:txBody>
+      </p:sp>
+      <p:sp>
+        <p:nvSpPr>
           <p:cNvPr id="2" name="Title 1"/>
           <p:cNvSpPr>
             <a:spLocks noGrp="1"/>
@@ -3499,8 +3675,8 @@
         </p:nvSpPr>
         <p:spPr>
           <a:xfrm>
-            <a:off x="640080" y="411480"/>
-            <a:ext cx="4251960" cy="822960"/>
+            <a:off x="640080" y="658368"/>
+            <a:ext cx="3749039" cy="868680"/>
           </a:xfrm>
         </p:spPr>
         <p:txBody>
@@ -3517,7 +3693,7 @@
             <a:r>
               <a:rPr sz="2600" b="1" i="0">
                 <a:solidFill>
-                  <a:srgbClr val="FFFFFF"/>
+                  <a:srgbClr val="26231F"/>
                 </a:solidFill>
               </a:rPr>
               <a:t>이번 달 고정지출부터 적어요</a:t>
@@ -3527,13 +3703,13 @@
       </p:sp>
       <p:sp>
         <p:nvSpPr>
-          <p:cNvPr id="4" name="번호"/>
+          <p:cNvPr id="7" name="번호"/>
           <p:cNvSpPr txBox="1"/>
           <p:nvPr/>
         </p:nvSpPr>
         <p:spPr>
           <a:xfrm>
-            <a:off x="640080" y="1737360"/>
+            <a:off x="640080" y="1874519"/>
             <a:ext cx="2194560" cy="1280160"/>
           </a:xfrm>
           <a:prstGeom prst="rect">
@@ -3555,7 +3731,7 @@
             <a:r>
               <a:rPr sz="6600" b="1" i="0">
                 <a:solidFill>
-                  <a:srgbClr val="45BCE3"/>
+                  <a:srgbClr val="98CFE1"/>
                 </a:solidFill>
               </a:rPr>
               <a:t>01</a:t>
@@ -3565,13 +3741,13 @@
       </p:sp>
       <p:sp>
         <p:nvSpPr>
-          <p:cNvPr id="5" name="본문"/>
+          <p:cNvPr id="8" name="본문"/>
           <p:cNvSpPr txBox="1"/>
           <p:nvPr/>
         </p:nvSpPr>
         <p:spPr>
           <a:xfrm>
-            <a:off x="640080" y="3200400"/>
+            <a:off x="640080" y="3337560"/>
             <a:ext cx="5577840" cy="2651760"/>
           </a:xfrm>
           <a:prstGeom prst="rect">
@@ -3593,7 +3769,7 @@
             <a:r>
               <a:rPr sz="2800" b="0" i="0">
                 <a:solidFill>
-                  <a:srgbClr val="2B2B2B"/>
+                  <a:srgbClr val="26231F"/>
                 </a:solidFill>
               </a:rPr>
               <a:t>월세·통신비·구독료처럼 매달 나가는 돈부터 한곳에 적어 보면 새는 곳이 보여요.</a:t>
@@ -3603,13 +3779,13 @@
       </p:sp>
       <p:sp>
         <p:nvSpPr>
-          <p:cNvPr id="6" name="쪽 번호"/>
+          <p:cNvPr id="9" name="쪽 번호"/>
           <p:cNvSpPr txBox="1"/>
           <p:nvPr/>
         </p:nvSpPr>
         <p:spPr>
           <a:xfrm>
-            <a:off x="640080" y="6035040"/>
+            <a:off x="640080" y="5806440"/>
             <a:ext cx="5577840" cy="365760"/>
           </a:xfrm>
           <a:prstGeom prst="rect">
@@ -3673,14 +3849,14 @@
         </p:nvSpPr>
         <p:spPr>
           <a:xfrm>
-            <a:off x="0" y="384048"/>
-            <a:ext cx="5349240" cy="896112"/>
-          </a:xfrm>
-          <a:prstGeom prst="homePlate">
+            <a:off x="0" y="6565392"/>
+            <a:ext cx="6858000" cy="292608"/>
+          </a:xfrm>
+          <a:prstGeom prst="rect">
             <a:avLst/>
           </a:prstGeom>
           <a:solidFill>
-            <a:srgbClr val="45BCE3"/>
+            <a:srgbClr val="ADDBEB"/>
           </a:solidFill>
           <a:ln>
             <a:noFill/>
@@ -3696,6 +3872,102 @@
       </p:sp>
       <p:sp>
         <p:nvSpPr>
+          <p:cNvPr id="4" name="장식"/>
+          <p:cNvSpPr/>
+          <p:nvPr/>
+        </p:nvSpPr>
+        <p:spPr>
+          <a:xfrm>
+            <a:off x="4846320" y="-1645920"/>
+            <a:ext cx="3474720" cy="3474720"/>
+          </a:xfrm>
+          <a:prstGeom prst="ellipse">
+            <a:avLst/>
+          </a:prstGeom>
+          <a:solidFill>
+            <a:srgbClr val="ADDBEB"/>
+          </a:solidFill>
+          <a:ln>
+            <a:noFill/>
+          </a:ln>
+        </p:spPr>
+        <p:txBody>
+          <a:bodyPr rtlCol="0" anchor="ctr"/>
+          <a:lstStyle/>
+          <a:p>
+            <a:pPr algn="ctr"/>
+          </a:p>
+        </p:txBody>
+      </p:sp>
+      <p:sp>
+        <p:nvSpPr>
+          <p:cNvPr id="5" name="상단 라벨"/>
+          <p:cNvSpPr txBox="1"/>
+          <p:nvPr/>
+        </p:nvSpPr>
+        <p:spPr>
+          <a:xfrm>
+            <a:off x="640080" y="274320"/>
+            <a:ext cx="5486400" cy="274320"/>
+          </a:xfrm>
+          <a:prstGeom prst="rect">
+            <a:avLst/>
+          </a:prstGeom>
+          <a:noFill/>
+        </p:spPr>
+        <p:txBody>
+          <a:bodyPr wrap="square" lIns="54864" rIns="54864" tIns="27432" bIns="27432" anchor="ctr">
+            <a:noAutofit/>
+          </a:bodyPr>
+          <a:lstStyle/>
+          <a:p>
+            <a:pPr algn="l">
+              <a:lnSpc>
+                <a:spcPct val="115000"/>
+              </a:lnSpc>
+            </a:pPr>
+            <a:r>
+              <a:rPr sz="900" b="1" i="0" spc="250">
+                <a:solidFill>
+                  <a:srgbClr val="26231F"/>
+                </a:solidFill>
+              </a:rPr>
+              <a:t>CARD NEWS</a:t>
+            </a:r>
+          </a:p>
+        </p:txBody>
+      </p:sp>
+      <p:sp>
+        <p:nvSpPr>
+          <p:cNvPr id="6" name="포인트"/>
+          <p:cNvSpPr/>
+          <p:nvPr/>
+        </p:nvSpPr>
+        <p:spPr>
+          <a:xfrm>
+            <a:off x="5715000" y="502919"/>
+            <a:ext cx="274320" cy="274320"/>
+          </a:xfrm>
+          <a:prstGeom prst="donut">
+            <a:avLst/>
+          </a:prstGeom>
+          <a:solidFill>
+            <a:srgbClr val="FFFFFF"/>
+          </a:solidFill>
+          <a:ln>
+            <a:noFill/>
+          </a:ln>
+        </p:spPr>
+        <p:txBody>
+          <a:bodyPr rtlCol="0" anchor="ctr"/>
+          <a:lstStyle/>
+          <a:p>
+            <a:pPr algn="ctr"/>
+          </a:p>
+        </p:txBody>
+      </p:sp>
+      <p:sp>
+        <p:nvSpPr>
           <p:cNvPr id="2" name="Title 1"/>
           <p:cNvSpPr>
             <a:spLocks noGrp="1"/>
@@ -3706,8 +3978,8 @@
         </p:nvSpPr>
         <p:spPr>
           <a:xfrm>
-            <a:off x="640080" y="411480"/>
-            <a:ext cx="4251960" cy="822960"/>
+            <a:off x="640080" y="658368"/>
+            <a:ext cx="3749039" cy="868680"/>
           </a:xfrm>
         </p:spPr>
         <p:txBody>
@@ -3724,7 +3996,7 @@
             <a:r>
               <a:rPr sz="2600" b="1" i="0">
                 <a:solidFill>
-                  <a:srgbClr val="FFFFFF"/>
+                  <a:srgbClr val="26231F"/>
                 </a:solidFill>
               </a:rPr>
               <a:t>카드 대신 현금 한 주</a:t>
@@ -3734,13 +4006,13 @@
       </p:sp>
       <p:sp>
         <p:nvSpPr>
-          <p:cNvPr id="4" name="번호"/>
+          <p:cNvPr id="7" name="번호"/>
           <p:cNvSpPr txBox="1"/>
           <p:nvPr/>
         </p:nvSpPr>
         <p:spPr>
           <a:xfrm>
-            <a:off x="640080" y="1737360"/>
+            <a:off x="640080" y="1874519"/>
             <a:ext cx="2194560" cy="1280160"/>
           </a:xfrm>
           <a:prstGeom prst="rect">
@@ -3762,7 +4034,7 @@
             <a:r>
               <a:rPr sz="6600" b="1" i="0">
                 <a:solidFill>
-                  <a:srgbClr val="45BCE3"/>
+                  <a:srgbClr val="98CFE1"/>
                 </a:solidFill>
               </a:rPr>
               <a:t>02</a:t>
@@ -3772,13 +4044,13 @@
       </p:sp>
       <p:sp>
         <p:nvSpPr>
-          <p:cNvPr id="5" name="본문"/>
+          <p:cNvPr id="8" name="본문"/>
           <p:cNvSpPr txBox="1"/>
           <p:nvPr/>
         </p:nvSpPr>
         <p:spPr>
           <a:xfrm>
-            <a:off x="640080" y="3200400"/>
+            <a:off x="640080" y="3337560"/>
             <a:ext cx="5577840" cy="2651760"/>
           </a:xfrm>
           <a:prstGeom prst="rect">
@@ -3800,7 +4072,7 @@
             <a:r>
               <a:rPr sz="2800" b="0" i="0">
                 <a:solidFill>
-                  <a:srgbClr val="2B2B2B"/>
+                  <a:srgbClr val="26231F"/>
                 </a:solidFill>
               </a:rPr>
               <a:t>일주일만 현금으로 써 보면 충동구매가 눈에 띄게 줄어요.</a:t>
@@ -3810,13 +4082,13 @@
       </p:sp>
       <p:sp>
         <p:nvSpPr>
-          <p:cNvPr id="6" name="쪽 번호"/>
+          <p:cNvPr id="9" name="쪽 번호"/>
           <p:cNvSpPr txBox="1"/>
           <p:nvPr/>
         </p:nvSpPr>
         <p:spPr>
           <a:xfrm>
-            <a:off x="640080" y="6035040"/>
+            <a:off x="640080" y="5806440"/>
             <a:ext cx="5577840" cy="365760"/>
           </a:xfrm>
           <a:prstGeom prst="rect">
@@ -3880,14 +4152,14 @@
         </p:nvSpPr>
         <p:spPr>
           <a:xfrm>
-            <a:off x="0" y="384048"/>
-            <a:ext cx="5349240" cy="896112"/>
-          </a:xfrm>
-          <a:prstGeom prst="homePlate">
+            <a:off x="0" y="6565392"/>
+            <a:ext cx="6858000" cy="292608"/>
+          </a:xfrm>
+          <a:prstGeom prst="rect">
             <a:avLst/>
           </a:prstGeom>
           <a:solidFill>
-            <a:srgbClr val="45BCE3"/>
+            <a:srgbClr val="ADDBEB"/>
           </a:solidFill>
           <a:ln>
             <a:noFill/>
@@ -3903,6 +4175,102 @@
       </p:sp>
       <p:sp>
         <p:nvSpPr>
+          <p:cNvPr id="4" name="장식"/>
+          <p:cNvSpPr/>
+          <p:nvPr/>
+        </p:nvSpPr>
+        <p:spPr>
+          <a:xfrm>
+            <a:off x="4846320" y="-1645920"/>
+            <a:ext cx="3474720" cy="3474720"/>
+          </a:xfrm>
+          <a:prstGeom prst="ellipse">
+            <a:avLst/>
+          </a:prstGeom>
+          <a:solidFill>
+            <a:srgbClr val="ADDBEB"/>
+          </a:solidFill>
+          <a:ln>
+            <a:noFill/>
+          </a:ln>
+        </p:spPr>
+        <p:txBody>
+          <a:bodyPr rtlCol="0" anchor="ctr"/>
+          <a:lstStyle/>
+          <a:p>
+            <a:pPr algn="ctr"/>
+          </a:p>
+        </p:txBody>
+      </p:sp>
+      <p:sp>
+        <p:nvSpPr>
+          <p:cNvPr id="5" name="상단 라벨"/>
+          <p:cNvSpPr txBox="1"/>
+          <p:nvPr/>
+        </p:nvSpPr>
+        <p:spPr>
+          <a:xfrm>
+            <a:off x="640080" y="274320"/>
+            <a:ext cx="5486400" cy="274320"/>
+          </a:xfrm>
+          <a:prstGeom prst="rect">
+            <a:avLst/>
+          </a:prstGeom>
+          <a:noFill/>
+        </p:spPr>
+        <p:txBody>
+          <a:bodyPr wrap="square" lIns="54864" rIns="54864" tIns="27432" bIns="27432" anchor="ctr">
+            <a:noAutofit/>
+          </a:bodyPr>
+          <a:lstStyle/>
+          <a:p>
+            <a:pPr algn="l">
+              <a:lnSpc>
+                <a:spcPct val="115000"/>
+              </a:lnSpc>
+            </a:pPr>
+            <a:r>
+              <a:rPr sz="900" b="1" i="0" spc="250">
+                <a:solidFill>
+                  <a:srgbClr val="26231F"/>
+                </a:solidFill>
+              </a:rPr>
+              <a:t>CARD NEWS</a:t>
+            </a:r>
+          </a:p>
+        </p:txBody>
+      </p:sp>
+      <p:sp>
+        <p:nvSpPr>
+          <p:cNvPr id="6" name="포인트"/>
+          <p:cNvSpPr/>
+          <p:nvPr/>
+        </p:nvSpPr>
+        <p:spPr>
+          <a:xfrm>
+            <a:off x="5715000" y="502919"/>
+            <a:ext cx="274320" cy="274320"/>
+          </a:xfrm>
+          <a:prstGeom prst="donut">
+            <a:avLst/>
+          </a:prstGeom>
+          <a:solidFill>
+            <a:srgbClr val="FFFFFF"/>
+          </a:solidFill>
+          <a:ln>
+            <a:noFill/>
+          </a:ln>
+        </p:spPr>
+        <p:txBody>
+          <a:bodyPr rtlCol="0" anchor="ctr"/>
+          <a:lstStyle/>
+          <a:p>
+            <a:pPr algn="ctr"/>
+          </a:p>
+        </p:txBody>
+      </p:sp>
+      <p:sp>
+        <p:nvSpPr>
           <p:cNvPr id="2" name="Title 1"/>
           <p:cNvSpPr>
             <a:spLocks noGrp="1"/>
@@ -3913,8 +4281,8 @@
         </p:nvSpPr>
         <p:spPr>
           <a:xfrm>
-            <a:off x="640080" y="411480"/>
-            <a:ext cx="4251960" cy="822960"/>
+            <a:off x="640080" y="658368"/>
+            <a:ext cx="3749039" cy="868680"/>
           </a:xfrm>
         </p:spPr>
         <p:txBody>
@@ -3931,7 +4299,7 @@
             <a:r>
               <a:rPr sz="2600" b="1" i="0">
                 <a:solidFill>
-                  <a:srgbClr val="FFFFFF"/>
+                  <a:srgbClr val="26231F"/>
                 </a:solidFill>
               </a:rPr>
               <a:t>장보기 전 냉장고 사진</a:t>
@@ -3941,13 +4309,13 @@
       </p:sp>
       <p:sp>
         <p:nvSpPr>
-          <p:cNvPr id="4" name="번호"/>
+          <p:cNvPr id="7" name="번호"/>
           <p:cNvSpPr txBox="1"/>
           <p:nvPr/>
         </p:nvSpPr>
         <p:spPr>
           <a:xfrm>
-            <a:off x="640080" y="1737360"/>
+            <a:off x="640080" y="1874519"/>
             <a:ext cx="2194560" cy="1280160"/>
           </a:xfrm>
           <a:prstGeom prst="rect">
@@ -3969,7 +4337,7 @@
             <a:r>
               <a:rPr sz="6600" b="1" i="0">
                 <a:solidFill>
-                  <a:srgbClr val="45BCE3"/>
+                  <a:srgbClr val="98CFE1"/>
                 </a:solidFill>
               </a:rPr>
               <a:t>03</a:t>
@@ -3979,13 +4347,13 @@
       </p:sp>
       <p:sp>
         <p:nvSpPr>
-          <p:cNvPr id="5" name="본문"/>
+          <p:cNvPr id="8" name="본문"/>
           <p:cNvSpPr txBox="1"/>
           <p:nvPr/>
         </p:nvSpPr>
         <p:spPr>
           <a:xfrm>
-            <a:off x="640080" y="3200400"/>
+            <a:off x="640080" y="3337560"/>
             <a:ext cx="5577840" cy="2651760"/>
           </a:xfrm>
           <a:prstGeom prst="rect">
@@ -4007,7 +4375,7 @@
             <a:r>
               <a:rPr sz="2800" b="0" i="0">
                 <a:solidFill>
-                  <a:srgbClr val="2B2B2B"/>
+                  <a:srgbClr val="26231F"/>
                 </a:solidFill>
               </a:rPr>
               <a:t>있는 재료를 확인하고 가면 같은 식재료를 또 사는 일이 줄어요.</a:t>
@@ -4017,13 +4385,13 @@
       </p:sp>
       <p:sp>
         <p:nvSpPr>
-          <p:cNvPr id="6" name="쪽 번호"/>
+          <p:cNvPr id="9" name="쪽 번호"/>
           <p:cNvSpPr txBox="1"/>
           <p:nvPr/>
         </p:nvSpPr>
         <p:spPr>
           <a:xfrm>
-            <a:off x="640080" y="6035040"/>
+            <a:off x="640080" y="5806440"/>
             <a:ext cx="5577840" cy="365760"/>
           </a:xfrm>
           <a:prstGeom prst="rect">
@@ -4087,14 +4455,14 @@
         </p:nvSpPr>
         <p:spPr>
           <a:xfrm>
-            <a:off x="0" y="384048"/>
-            <a:ext cx="5349240" cy="896112"/>
-          </a:xfrm>
-          <a:prstGeom prst="homePlate">
+            <a:off x="0" y="6565392"/>
+            <a:ext cx="6858000" cy="292608"/>
+          </a:xfrm>
+          <a:prstGeom prst="rect">
             <a:avLst/>
           </a:prstGeom>
           <a:solidFill>
-            <a:srgbClr val="45BCE3"/>
+            <a:srgbClr val="ADDBEB"/>
           </a:solidFill>
           <a:ln>
             <a:noFill/>
@@ -4110,6 +4478,102 @@
       </p:sp>
       <p:sp>
         <p:nvSpPr>
+          <p:cNvPr id="4" name="장식"/>
+          <p:cNvSpPr/>
+          <p:nvPr/>
+        </p:nvSpPr>
+        <p:spPr>
+          <a:xfrm>
+            <a:off x="4846320" y="-1645920"/>
+            <a:ext cx="3474720" cy="3474720"/>
+          </a:xfrm>
+          <a:prstGeom prst="ellipse">
+            <a:avLst/>
+          </a:prstGeom>
+          <a:solidFill>
+            <a:srgbClr val="ADDBEB"/>
+          </a:solidFill>
+          <a:ln>
+            <a:noFill/>
+          </a:ln>
+        </p:spPr>
+        <p:txBody>
+          <a:bodyPr rtlCol="0" anchor="ctr"/>
+          <a:lstStyle/>
+          <a:p>
+            <a:pPr algn="ctr"/>
+          </a:p>
+        </p:txBody>
+      </p:sp>
+      <p:sp>
+        <p:nvSpPr>
+          <p:cNvPr id="5" name="상단 라벨"/>
+          <p:cNvSpPr txBox="1"/>
+          <p:nvPr/>
+        </p:nvSpPr>
+        <p:spPr>
+          <a:xfrm>
+            <a:off x="640080" y="274320"/>
+            <a:ext cx="5486400" cy="274320"/>
+          </a:xfrm>
+          <a:prstGeom prst="rect">
+            <a:avLst/>
+          </a:prstGeom>
+          <a:noFill/>
+        </p:spPr>
+        <p:txBody>
+          <a:bodyPr wrap="square" lIns="54864" rIns="54864" tIns="27432" bIns="27432" anchor="ctr">
+            <a:noAutofit/>
+          </a:bodyPr>
+          <a:lstStyle/>
+          <a:p>
+            <a:pPr algn="l">
+              <a:lnSpc>
+                <a:spcPct val="115000"/>
+              </a:lnSpc>
+            </a:pPr>
+            <a:r>
+              <a:rPr sz="900" b="1" i="0" spc="250">
+                <a:solidFill>
+                  <a:srgbClr val="26231F"/>
+                </a:solidFill>
+              </a:rPr>
+              <a:t>CARD NEWS</a:t>
+            </a:r>
+          </a:p>
+        </p:txBody>
+      </p:sp>
+      <p:sp>
+        <p:nvSpPr>
+          <p:cNvPr id="6" name="포인트"/>
+          <p:cNvSpPr/>
+          <p:nvPr/>
+        </p:nvSpPr>
+        <p:spPr>
+          <a:xfrm>
+            <a:off x="5715000" y="502919"/>
+            <a:ext cx="274320" cy="274320"/>
+          </a:xfrm>
+          <a:prstGeom prst="donut">
+            <a:avLst/>
+          </a:prstGeom>
+          <a:solidFill>
+            <a:srgbClr val="FFFFFF"/>
+          </a:solidFill>
+          <a:ln>
+            <a:noFill/>
+          </a:ln>
+        </p:spPr>
+        <p:txBody>
+          <a:bodyPr rtlCol="0" anchor="ctr"/>
+          <a:lstStyle/>
+          <a:p>
+            <a:pPr algn="ctr"/>
+          </a:p>
+        </p:txBody>
+      </p:sp>
+      <p:sp>
+        <p:nvSpPr>
           <p:cNvPr id="2" name="Title 1"/>
           <p:cNvSpPr>
             <a:spLocks noGrp="1"/>
@@ -4120,8 +4584,8 @@
         </p:nvSpPr>
         <p:spPr>
           <a:xfrm>
-            <a:off x="640080" y="411480"/>
-            <a:ext cx="4251960" cy="822960"/>
+            <a:off x="640080" y="658368"/>
+            <a:ext cx="3749039" cy="868680"/>
           </a:xfrm>
         </p:spPr>
         <p:txBody>
@@ -4138,7 +4602,7 @@
             <a:r>
               <a:rPr sz="2600" b="1" i="0">
                 <a:solidFill>
-                  <a:srgbClr val="FFFFFF"/>
+                  <a:srgbClr val="26231F"/>
                 </a:solidFill>
               </a:rPr>
               <a:t>작은 목표 통장 만들기</a:t>
@@ -4148,13 +4612,13 @@
       </p:sp>
       <p:sp>
         <p:nvSpPr>
-          <p:cNvPr id="4" name="번호"/>
+          <p:cNvPr id="7" name="번호"/>
           <p:cNvSpPr txBox="1"/>
           <p:nvPr/>
         </p:nvSpPr>
         <p:spPr>
           <a:xfrm>
-            <a:off x="640080" y="1737360"/>
+            <a:off x="640080" y="1874519"/>
             <a:ext cx="2194560" cy="1280160"/>
           </a:xfrm>
           <a:prstGeom prst="rect">
@@ -4176,7 +4640,7 @@
             <a:r>
               <a:rPr sz="6600" b="1" i="0">
                 <a:solidFill>
-                  <a:srgbClr val="45BCE3"/>
+                  <a:srgbClr val="98CFE1"/>
                 </a:solidFill>
               </a:rPr>
               <a:t>04</a:t>
@@ -4186,13 +4650,13 @@
       </p:sp>
       <p:sp>
         <p:nvSpPr>
-          <p:cNvPr id="5" name="본문"/>
+          <p:cNvPr id="8" name="본문"/>
           <p:cNvSpPr txBox="1"/>
           <p:nvPr/>
         </p:nvSpPr>
         <p:spPr>
           <a:xfrm>
-            <a:off x="640080" y="3200400"/>
+            <a:off x="640080" y="3337560"/>
             <a:ext cx="5577840" cy="2651760"/>
           </a:xfrm>
           <a:prstGeom prst="rect">
@@ -4214,7 +4678,7 @@
             <a:r>
               <a:rPr sz="2800" b="0" i="0">
                 <a:solidFill>
-                  <a:srgbClr val="2B2B2B"/>
+                  <a:srgbClr val="26231F"/>
                 </a:solidFill>
               </a:rPr>
               <a:t>여행·선물·비상금처럼 이름을 붙이면 모으는 재미가 커져요.</a:t>
@@ -4224,13 +4688,13 @@
       </p:sp>
       <p:sp>
         <p:nvSpPr>
-          <p:cNvPr id="6" name="쪽 번호"/>
+          <p:cNvPr id="9" name="쪽 번호"/>
           <p:cNvSpPr txBox="1"/>
           <p:nvPr/>
         </p:nvSpPr>
         <p:spPr>
           <a:xfrm>
-            <a:off x="640080" y="6035040"/>
+            <a:off x="640080" y="5806440"/>
             <a:ext cx="5577840" cy="365760"/>
           </a:xfrm>
           <a:prstGeom prst="rect">
@@ -4294,14 +4758,14 @@
         </p:nvSpPr>
         <p:spPr>
           <a:xfrm>
-            <a:off x="0" y="384048"/>
-            <a:ext cx="5349240" cy="896112"/>
-          </a:xfrm>
-          <a:prstGeom prst="homePlate">
+            <a:off x="0" y="6565392"/>
+            <a:ext cx="6858000" cy="292608"/>
+          </a:xfrm>
+          <a:prstGeom prst="rect">
             <a:avLst/>
           </a:prstGeom>
           <a:solidFill>
-            <a:srgbClr val="45BCE3"/>
+            <a:srgbClr val="ADDBEB"/>
           </a:solidFill>
           <a:ln>
             <a:noFill/>
@@ -4317,6 +4781,102 @@
       </p:sp>
       <p:sp>
         <p:nvSpPr>
+          <p:cNvPr id="4" name="장식"/>
+          <p:cNvSpPr/>
+          <p:nvPr/>
+        </p:nvSpPr>
+        <p:spPr>
+          <a:xfrm>
+            <a:off x="4846320" y="-1645920"/>
+            <a:ext cx="3474720" cy="3474720"/>
+          </a:xfrm>
+          <a:prstGeom prst="ellipse">
+            <a:avLst/>
+          </a:prstGeom>
+          <a:solidFill>
+            <a:srgbClr val="ADDBEB"/>
+          </a:solidFill>
+          <a:ln>
+            <a:noFill/>
+          </a:ln>
+        </p:spPr>
+        <p:txBody>
+          <a:bodyPr rtlCol="0" anchor="ctr"/>
+          <a:lstStyle/>
+          <a:p>
+            <a:pPr algn="ctr"/>
+          </a:p>
+        </p:txBody>
+      </p:sp>
+      <p:sp>
+        <p:nvSpPr>
+          <p:cNvPr id="5" name="상단 라벨"/>
+          <p:cNvSpPr txBox="1"/>
+          <p:nvPr/>
+        </p:nvSpPr>
+        <p:spPr>
+          <a:xfrm>
+            <a:off x="640080" y="274320"/>
+            <a:ext cx="5486400" cy="274320"/>
+          </a:xfrm>
+          <a:prstGeom prst="rect">
+            <a:avLst/>
+          </a:prstGeom>
+          <a:noFill/>
+        </p:spPr>
+        <p:txBody>
+          <a:bodyPr wrap="square" lIns="54864" rIns="54864" tIns="27432" bIns="27432" anchor="ctr">
+            <a:noAutofit/>
+          </a:bodyPr>
+          <a:lstStyle/>
+          <a:p>
+            <a:pPr algn="l">
+              <a:lnSpc>
+                <a:spcPct val="115000"/>
+              </a:lnSpc>
+            </a:pPr>
+            <a:r>
+              <a:rPr sz="900" b="1" i="0" spc="250">
+                <a:solidFill>
+                  <a:srgbClr val="26231F"/>
+                </a:solidFill>
+              </a:rPr>
+              <a:t>CARD NEWS</a:t>
+            </a:r>
+          </a:p>
+        </p:txBody>
+      </p:sp>
+      <p:sp>
+        <p:nvSpPr>
+          <p:cNvPr id="6" name="포인트"/>
+          <p:cNvSpPr/>
+          <p:nvPr/>
+        </p:nvSpPr>
+        <p:spPr>
+          <a:xfrm>
+            <a:off x="5715000" y="502919"/>
+            <a:ext cx="274320" cy="274320"/>
+          </a:xfrm>
+          <a:prstGeom prst="donut">
+            <a:avLst/>
+          </a:prstGeom>
+          <a:solidFill>
+            <a:srgbClr val="FFFFFF"/>
+          </a:solidFill>
+          <a:ln>
+            <a:noFill/>
+          </a:ln>
+        </p:spPr>
+        <p:txBody>
+          <a:bodyPr rtlCol="0" anchor="ctr"/>
+          <a:lstStyle/>
+          <a:p>
+            <a:pPr algn="ctr"/>
+          </a:p>
+        </p:txBody>
+      </p:sp>
+      <p:sp>
+        <p:nvSpPr>
           <p:cNvPr id="2" name="Title 1"/>
           <p:cNvSpPr>
             <a:spLocks noGrp="1"/>
@@ -4327,8 +4887,8 @@
         </p:nvSpPr>
         <p:spPr>
           <a:xfrm>
-            <a:off x="640080" y="411480"/>
-            <a:ext cx="4251960" cy="822960"/>
+            <a:off x="640080" y="658368"/>
+            <a:ext cx="3749039" cy="868680"/>
           </a:xfrm>
         </p:spPr>
         <p:txBody>
@@ -4345,7 +4905,7 @@
             <a:r>
               <a:rPr sz="2600" b="1" i="0">
                 <a:solidFill>
-                  <a:srgbClr val="FFFFFF"/>
+                  <a:srgbClr val="26231F"/>
                 </a:solidFill>
               </a:rPr>
               <a:t>주말 5분 가계부</a:t>
@@ -4355,13 +4915,13 @@
       </p:sp>
       <p:sp>
         <p:nvSpPr>
-          <p:cNvPr id="4" name="번호"/>
+          <p:cNvPr id="7" name="번호"/>
           <p:cNvSpPr txBox="1"/>
           <p:nvPr/>
         </p:nvSpPr>
         <p:spPr>
           <a:xfrm>
-            <a:off x="640080" y="1737360"/>
+            <a:off x="640080" y="1874519"/>
             <a:ext cx="2194560" cy="1280160"/>
           </a:xfrm>
           <a:prstGeom prst="rect">
@@ -4383,7 +4943,7 @@
             <a:r>
               <a:rPr sz="6600" b="1" i="0">
                 <a:solidFill>
-                  <a:srgbClr val="45BCE3"/>
+                  <a:srgbClr val="98CFE1"/>
                 </a:solidFill>
               </a:rPr>
               <a:t>05</a:t>
@@ -4393,13 +4953,13 @@
       </p:sp>
       <p:sp>
         <p:nvSpPr>
-          <p:cNvPr id="5" name="본문"/>
+          <p:cNvPr id="8" name="본문"/>
           <p:cNvSpPr txBox="1"/>
           <p:nvPr/>
         </p:nvSpPr>
         <p:spPr>
           <a:xfrm>
-            <a:off x="640080" y="3200400"/>
+            <a:off x="640080" y="3337560"/>
             <a:ext cx="5577840" cy="2651760"/>
           </a:xfrm>
           <a:prstGeom prst="rect">
@@ -4421,7 +4981,7 @@
             <a:r>
               <a:rPr sz="2800" b="0" i="0">
                 <a:solidFill>
-                  <a:srgbClr val="2B2B2B"/>
+                  <a:srgbClr val="26231F"/>
                 </a:solidFill>
               </a:rPr>
               <a:t>영수증을 모아 두었다가 주말에 5분만 적어 보세요.</a:t>
@@ -4431,13 +4991,13 @@
       </p:sp>
       <p:sp>
         <p:nvSpPr>
-          <p:cNvPr id="6" name="쪽 번호"/>
+          <p:cNvPr id="9" name="쪽 번호"/>
           <p:cNvSpPr txBox="1"/>
           <p:nvPr/>
         </p:nvSpPr>
         <p:spPr>
           <a:xfrm>
-            <a:off x="640080" y="6035040"/>
+            <a:off x="640080" y="5806440"/>
             <a:ext cx="5577840" cy="365760"/>
           </a:xfrm>
           <a:prstGeom prst="rect">
@@ -4478,6 +5038,14 @@
 <file path=ppt/slides/slide7.xml><?xml version="1.0" encoding="utf-8"?>
 <p:sld xmlns:a="http://schemas.openxmlformats.org/drawingml/2006/main" xmlns:p="http://schemas.openxmlformats.org/presentationml/2006/main" xmlns:r="http://schemas.openxmlformats.org/officeDocument/2006/relationships">
   <p:cSld>
+    <p:bg>
+      <p:bgPr>
+        <a:solidFill>
+          <a:srgbClr val="D5EEF6"/>
+        </a:solidFill>
+        <a:effectLst/>
+      </p:bgPr>
+    </p:bg>
     <p:spTree>
       <p:nvGrpSpPr>
         <p:cNvPr id="1" name=""/>
@@ -4485,30 +5053,102 @@
         <p:nvPr/>
       </p:nvGrpSpPr>
       <p:grpSpPr/>
-      <p:pic>
-        <p:nvPicPr>
-          <p:cNvPr id="3" name="표지 그림" descr="news-46.jpg"/>
-          <p:cNvPicPr>
-            <a:picLocks noChangeAspect="1"/>
-          </p:cNvPicPr>
+      <p:sp>
+        <p:nvSpPr>
+          <p:cNvPr id="3" name="장식"/>
+          <p:cNvSpPr/>
           <p:nvPr/>
-        </p:nvPicPr>
-        <p:blipFill>
-          <a:blip r:embed="rId2"/>
-          <a:stretch>
-            <a:fillRect/>
-          </a:stretch>
-        </p:blipFill>
-        <p:spPr>
-          <a:xfrm>
-            <a:off x="0" y="0"/>
-            <a:ext cx="6858000" cy="6858000"/>
+        </p:nvSpPr>
+        <p:spPr>
+          <a:xfrm>
+            <a:off x="1600200" y="822960"/>
+            <a:ext cx="3657600" cy="3657600"/>
+          </a:xfrm>
+          <a:prstGeom prst="ellipse">
+            <a:avLst/>
+          </a:prstGeom>
+          <a:solidFill>
+            <a:srgbClr val="FFFFFF"/>
+          </a:solidFill>
+          <a:ln>
+            <a:noFill/>
+          </a:ln>
+        </p:spPr>
+        <p:txBody>
+          <a:bodyPr rtlCol="0" anchor="ctr"/>
+          <a:lstStyle/>
+          <a:p>
+            <a:pPr algn="ctr"/>
+          </a:p>
+        </p:txBody>
+      </p:sp>
+      <p:sp>
+        <p:nvSpPr>
+          <p:cNvPr id="4" name="장식"/>
+          <p:cNvSpPr/>
+          <p:nvPr/>
+        </p:nvSpPr>
+        <p:spPr>
+          <a:xfrm>
+            <a:off x="3246120" y="502920"/>
+            <a:ext cx="822960" cy="822960"/>
+          </a:xfrm>
+          <a:prstGeom prst="ellipse">
+            <a:avLst/>
+          </a:prstGeom>
+          <a:solidFill>
+            <a:srgbClr val="ADDBEB"/>
+          </a:solidFill>
+          <a:ln>
+            <a:noFill/>
+          </a:ln>
+        </p:spPr>
+        <p:txBody>
+          <a:bodyPr rtlCol="0" anchor="ctr"/>
+          <a:lstStyle/>
+          <a:p>
+            <a:pPr algn="ctr"/>
+          </a:p>
+        </p:txBody>
+      </p:sp>
+      <p:sp>
+        <p:nvSpPr>
+          <p:cNvPr id="5" name="라벨"/>
+          <p:cNvSpPr txBox="1"/>
+          <p:nvPr/>
+        </p:nvSpPr>
+        <p:spPr>
+          <a:xfrm>
+            <a:off x="731520" y="4572000"/>
+            <a:ext cx="5394960" cy="274320"/>
           </a:xfrm>
           <a:prstGeom prst="rect">
             <a:avLst/>
           </a:prstGeom>
-        </p:spPr>
-      </p:pic>
+          <a:noFill/>
+        </p:spPr>
+        <p:txBody>
+          <a:bodyPr wrap="square" lIns="54864" rIns="54864" tIns="27432" bIns="27432" anchor="t">
+            <a:noAutofit/>
+          </a:bodyPr>
+          <a:lstStyle/>
+          <a:p>
+            <a:pPr algn="ctr">
+              <a:lnSpc>
+                <a:spcPct val="115000"/>
+              </a:lnSpc>
+            </a:pPr>
+            <a:r>
+              <a:rPr sz="1000" b="1" i="0" spc="250">
+                <a:solidFill>
+                  <a:srgbClr val="26231F"/>
+                </a:solidFill>
+              </a:rPr>
+              <a:t>CARD NEWS</a:t>
+            </a:r>
+          </a:p>
+        </p:txBody>
+      </p:sp>
       <p:sp>
         <p:nvSpPr>
           <p:cNvPr id="2" name="Title 1"/>
@@ -4521,8 +5161,8 @@
         </p:nvSpPr>
         <p:spPr>
           <a:xfrm>
-            <a:off x="685800" y="960120"/>
-            <a:ext cx="5486400" cy="1463040"/>
+            <a:off x="731520" y="4892040"/>
+            <a:ext cx="5394960" cy="914400"/>
           </a:xfrm>
         </p:spPr>
         <p:txBody>
@@ -4531,7 +5171,7 @@
           </a:bodyPr>
           <a:lstStyle/>
           <a:p>
-            <a:pPr algn="l">
+            <a:pPr algn="ctr">
               <a:lnSpc>
                 <a:spcPct val="105000"/>
               </a:lnSpc>
@@ -4539,7 +5179,7 @@
             <a:r>
               <a:rPr sz="2800" b="1" i="0">
                 <a:solidFill>
-                  <a:srgbClr val="1C5A6E"/>
+                  <a:srgbClr val="26231F"/>
                 </a:solidFill>
               </a:rPr>
               <a:t>저장해 두고 필요할 때 꺼내 보세요</a:t>
@@ -4549,14 +5189,14 @@
       </p:sp>
       <p:sp>
         <p:nvSpPr>
-          <p:cNvPr id="4" name="한 줄 문구"/>
+          <p:cNvPr id="6" name="한 줄 문구"/>
           <p:cNvSpPr txBox="1"/>
           <p:nvPr/>
         </p:nvSpPr>
         <p:spPr>
           <a:xfrm>
-            <a:off x="685800" y="2560320"/>
-            <a:ext cx="5486400" cy="822960"/>
+            <a:off x="731520" y="5806440"/>
+            <a:ext cx="5394960" cy="822960"/>
           </a:xfrm>
           <a:prstGeom prst="rect">
             <a:avLst/>
@@ -4569,15 +5209,15 @@
           </a:bodyPr>
           <a:lstStyle/>
           <a:p>
-            <a:pPr algn="l">
+            <a:pPr algn="ctr">
               <a:lnSpc>
                 <a:spcPct val="115000"/>
               </a:lnSpc>
             </a:pPr>
             <a:r>
-              <a:rPr sz="1500" b="0" i="1">
+              <a:rPr sz="1500" b="0" i="0">
                 <a:solidFill>
-                  <a:srgbClr val="1C5A6E"/>
+                  <a:srgbClr val="26231F"/>
                 </a:solidFill>
               </a:rPr>
               <a:t>마음에 들면 공유해 주세요</a:t>
@@ -4587,14 +5227,14 @@
       </p:sp>
       <p:sp>
         <p:nvSpPr>
-          <p:cNvPr id="5" name="안내 문구"/>
+          <p:cNvPr id="7" name="안내 문구"/>
           <p:cNvSpPr txBox="1"/>
           <p:nvPr/>
         </p:nvSpPr>
         <p:spPr>
           <a:xfrm>
-            <a:off x="685800" y="3429000"/>
-            <a:ext cx="5486400" cy="914400"/>
+            <a:off x="731520" y="6675120"/>
+            <a:ext cx="5394960" cy="914400"/>
           </a:xfrm>
           <a:prstGeom prst="rect">
             <a:avLst/>
@@ -4607,7 +5247,7 @@
           </a:bodyPr>
           <a:lstStyle/>
           <a:p>
-            <a:pPr algn="l">
+            <a:pPr algn="ctr">
               <a:lnSpc>
                 <a:spcPct val="115000"/>
               </a:lnSpc>
@@ -4615,7 +5255,7 @@
             <a:r>
               <a:rPr sz="1200" b="0" i="0">
                 <a:solidFill>
-                  <a:srgbClr val="666666"/>
+                  <a:srgbClr val="26231F"/>
                 </a:solidFill>
               </a:rPr>
               <a:t>이름 · 연락처를 입력하세요</a:t>
@@ -4642,34 +5282,34 @@
         <a:sysClr val="window" lastClr="FFFFFF"/>
       </a:lt1>
       <a:dk2>
-        <a:srgbClr val="1C5A6E"/>
+        <a:srgbClr val="274149"/>
       </a:dk2>
       <a:lt2>
-        <a:srgbClr val="F6FCFE"/>
+        <a:srgbClr val="ECF7FB"/>
       </a:lt2>
       <a:accent1>
-        <a:srgbClr val="45BCE3"/>
+        <a:srgbClr val="98CFE1"/>
       </a:accent1>
       <a:accent2>
-        <a:srgbClr val="E25A71"/>
+        <a:srgbClr val="B8C6EA"/>
       </a:accent2>
       <a:accent3>
-        <a:srgbClr val="1C5A6E"/>
+        <a:srgbClr val="274149"/>
       </a:accent3>
       <a:accent4>
-        <a:srgbClr val="DDF5FD"/>
+        <a:srgbClr val="D5EEF6"/>
       </a:accent4>
       <a:accent5>
-        <a:srgbClr val="948BAA"/>
+        <a:srgbClr val="A8CAE6"/>
       </a:accent5>
       <a:accent6>
-        <a:srgbClr val="779CA8"/>
+        <a:srgbClr val="7D8D92"/>
       </a:accent6>
       <a:hlink>
-        <a:srgbClr val="45BCE3"/>
+        <a:srgbClr val="98CFE1"/>
       </a:hlink>
       <a:folHlink>
-        <a:srgbClr val="1C5A6E"/>
+        <a:srgbClr val="274149"/>
       </a:folHlink>
     </a:clrScheme>
     <a:fontScheme name="Office">
